--- a/deck/GB10-Demos-for-Events.pptx
+++ b/deck/GB10-Demos-for-Events.pptx
@@ -1435,7 +1435,7 @@
           <a:lstStyle/>
           <a:p>
             <a:r>
-              <a:t>The deterministic cross-document check is the strongest point for a regulated buyer: the LLM extracts, but the decision rests on arithmetic that cannot hallucinate.</a:t>
+              <a:t>The deterministic cross-document check is the strongest point for a regulated buyer: the model extracts, but the decision rests on arithmetic that cannot hallucinate. Adapter status is visible at /health - confirm it says '+ LoRA' before demoing.</a:t>
             </a:r>
           </a:p>
         </p:txBody>
@@ -12921,7 +12921,7 @@
                 </a:solidFill>
                 <a:latin typeface="Consolas"/>
               </a:rPr>
-              <a:t>Qwen2.5-VL-7B · 8 services</a:t>
+              <a:t>fine-tuned Qwen2.5-VL-7B</a:t>
             </a:r>
           </a:p>
         </p:txBody>
@@ -13750,14 +13750,82 @@
       </p:sp>
       <p:sp>
         <p:nvSpPr>
-          <p:cNvPr id="8" name="TextBox 7"/>
+          <p:cNvPr id="8" name="Rectangle 7"/>
+          <p:cNvSpPr/>
+          <p:nvPr/>
+        </p:nvSpPr>
+        <p:spPr>
+          <a:xfrm>
+            <a:off x="721995" y="1864994"/>
+            <a:ext cx="6694170" cy="3718179"/>
+          </a:xfrm>
+          <a:prstGeom prst="rect">
+            <a:avLst/>
+          </a:prstGeom>
+          <a:noFill/>
+          <a:ln w="12700">
+            <a:solidFill>
+              <a:srgbClr val="22303F"/>
+            </a:solidFill>
+          </a:ln>
+          <a:effectLst/>
+        </p:spPr>
+        <p:style>
+          <a:lnRef idx="1">
+            <a:schemeClr val="accent1"/>
+          </a:lnRef>
+          <a:fillRef idx="3">
+            <a:schemeClr val="accent1"/>
+          </a:fillRef>
+          <a:effectRef idx="2">
+            <a:schemeClr val="accent1"/>
+          </a:effectRef>
+          <a:fontRef idx="minor">
+            <a:schemeClr val="lt1"/>
+          </a:fontRef>
+        </p:style>
+        <p:txBody>
+          <a:bodyPr rtlCol="0" anchor="ctr"/>
+          <a:lstStyle/>
+          <a:p>
+            <a:pPr algn="ctr"/>
+          </a:p>
+        </p:txBody>
+      </p:sp>
+      <p:pic>
+        <p:nvPicPr>
+          <p:cNvPr id="9" name="Picture 8" descr="loan-ui.png"/>
+          <p:cNvPicPr>
+            <a:picLocks noChangeAspect="1"/>
+          </p:cNvPicPr>
+          <p:nvPr/>
+        </p:nvPicPr>
+        <p:blipFill>
+          <a:blip r:embed="rId2"/>
+          <a:stretch>
+            <a:fillRect/>
+          </a:stretch>
+        </p:blipFill>
+        <p:spPr>
+          <a:xfrm>
+            <a:off x="731520" y="1874519"/>
+            <a:ext cx="6675120" cy="3699129"/>
+          </a:xfrm>
+          <a:prstGeom prst="rect">
+            <a:avLst/>
+          </a:prstGeom>
+        </p:spPr>
+      </p:pic>
+      <p:sp>
+        <p:nvSpPr>
+          <p:cNvPr id="10" name="TextBox 9"/>
           <p:cNvSpPr txBox="1"/>
           <p:nvPr/>
         </p:nvSpPr>
         <p:spPr>
           <a:xfrm>
-            <a:off x="731520" y="1920240"/>
-            <a:ext cx="640080" cy="457200"/>
+            <a:off x="7680960" y="1920240"/>
+            <a:ext cx="3749039" cy="4114800"/>
           </a:xfrm>
           <a:prstGeom prst="rect">
             <a:avLst/>
@@ -13772,460 +13840,179 @@
           <a:p>
             <a:pPr algn="l">
               <a:spcAft>
+                <a:spcPts val="300"/>
+              </a:spcAft>
+            </a:pPr>
+            <a:r>
+              <a:rPr sz="1350" b="1">
+                <a:solidFill>
+                  <a:srgbClr val="4AA8E8"/>
+                </a:solidFill>
+                <a:latin typeface="Consolas"/>
+              </a:rPr>
+              <a:t>01   Capture</a:t>
+            </a:r>
+          </a:p>
+          <a:p>
+            <a:pPr>
+              <a:spcAft>
+                <a:spcPts val="1100"/>
+              </a:spcAft>
+            </a:pPr>
+            <a:r>
+              <a:rPr sz="1200" b="0">
+                <a:solidFill>
+                  <a:srgbClr val="8BA0B6"/>
+                </a:solidFill>
+                <a:latin typeface="Segoe UI"/>
+              </a:rPr>
+              <a:t>Applicant uploads identity and income documents.</a:t>
+            </a:r>
+          </a:p>
+          <a:p>
+            <a:pPr>
+              <a:spcAft>
+                <a:spcPts val="300"/>
+              </a:spcAft>
+            </a:pPr>
+            <a:r>
+              <a:rPr sz="1350" b="1">
+                <a:solidFill>
+                  <a:srgbClr val="4AA8E8"/>
+                </a:solidFill>
+                <a:latin typeface="Consolas"/>
+              </a:rPr>
+              <a:t>02   Read</a:t>
+            </a:r>
+          </a:p>
+          <a:p>
+            <a:pPr>
+              <a:spcAft>
+                <a:spcPts val="1100"/>
+              </a:spcAft>
+            </a:pPr>
+            <a:r>
+              <a:rPr sz="1200" b="0">
+                <a:solidFill>
+                  <a:srgbClr val="8BA0B6"/>
+                </a:solidFill>
+                <a:latin typeface="Segoe UI"/>
+              </a:rPr>
+              <a:t>A fine-tuned 7B vision model reads each one natively — no OCR-then-parse, no per-template rules.</a:t>
+            </a:r>
+          </a:p>
+          <a:p>
+            <a:pPr>
+              <a:spcAft>
+                <a:spcPts val="300"/>
+              </a:spcAft>
+            </a:pPr>
+            <a:r>
+              <a:rPr sz="1350" b="1">
+                <a:solidFill>
+                  <a:srgbClr val="4AA8E8"/>
+                </a:solidFill>
+                <a:latin typeface="Consolas"/>
+              </a:rPr>
+              <a:t>03   Cross-check</a:t>
+            </a:r>
+          </a:p>
+          <a:p>
+            <a:pPr>
+              <a:spcAft>
+                <a:spcPts val="1100"/>
+              </a:spcAft>
+            </a:pPr>
+            <a:r>
+              <a:rPr sz="1200" b="0">
+                <a:solidFill>
+                  <a:srgbClr val="8BA0B6"/>
+                </a:solidFill>
+                <a:latin typeface="Segoe UI"/>
+              </a:rPr>
+              <a:t>Deterministic validation across documents: name, employer, declared income.</a:t>
+            </a:r>
+          </a:p>
+          <a:p>
+            <a:pPr>
+              <a:spcAft>
+                <a:spcPts val="300"/>
+              </a:spcAft>
+            </a:pPr>
+            <a:r>
+              <a:rPr sz="1350" b="1">
+                <a:solidFill>
+                  <a:srgbClr val="4AA8E8"/>
+                </a:solidFill>
+                <a:latin typeface="Consolas"/>
+              </a:rPr>
+              <a:t>04   Decide</a:t>
+            </a:r>
+          </a:p>
+          <a:p>
+            <a:pPr>
+              <a:spcAft>
+                <a:spcPts val="1100"/>
+              </a:spcAft>
+            </a:pPr>
+            <a:r>
+              <a:rPr sz="1200" b="0">
+                <a:solidFill>
+                  <a:srgbClr val="8BA0B6"/>
+                </a:solidFill>
+                <a:latin typeface="Segoe UI"/>
+              </a:rPr>
+              <a:t>A state machine walks the approval path and records why.</a:t>
+            </a:r>
+          </a:p>
+          <a:p>
+            <a:pPr>
+              <a:spcAft>
                 <a:spcPts val="0"/>
               </a:spcAft>
             </a:pPr>
             <a:r>
-              <a:rPr sz="1500" b="1">
-                <a:solidFill>
-                  <a:srgbClr val="4AA8E8"/>
+              <a:rPr sz="1150" b="0">
+                <a:solidFill>
+                  <a:srgbClr val="E8EEF5"/>
                 </a:solidFill>
                 <a:latin typeface="Consolas"/>
               </a:rPr>
-              <a:t>01</a:t>
-            </a:r>
-          </a:p>
-        </p:txBody>
-      </p:sp>
-      <p:sp>
-        <p:nvSpPr>
-          <p:cNvPr id="9" name="TextBox 8"/>
-          <p:cNvSpPr txBox="1"/>
-          <p:nvPr/>
-        </p:nvSpPr>
-        <p:spPr>
-          <a:xfrm>
-            <a:off x="1463040" y="1900240"/>
-            <a:ext cx="2103120" cy="457200"/>
-          </a:xfrm>
-          <a:prstGeom prst="rect">
-            <a:avLst/>
-          </a:prstGeom>
-          <a:noFill/>
-        </p:spPr>
-        <p:txBody>
-          <a:bodyPr wrap="square" lIns="0" rIns="0" tIns="0" bIns="0">
-            <a:spAutoFit/>
-          </a:bodyPr>
-          <a:lstStyle/>
-          <a:p>
-            <a:pPr algn="l">
-              <a:spcAft>
-                <a:spcPts val="0"/>
-              </a:spcAft>
-            </a:pPr>
-            <a:r>
-              <a:rPr sz="1500" b="1">
+              <a:t>Fine-tuned on Egyptian documents:</a:t>
+            </a:r>
+            <a:br/>
+            <a:r>
+              <a:rPr sz="1150" b="0">
                 <a:solidFill>
                   <a:srgbClr val="E8EEF5"/>
                 </a:solidFill>
-                <a:latin typeface="Segoe UI"/>
-              </a:rPr>
-              <a:t>Capture</a:t>
-            </a:r>
-          </a:p>
-        </p:txBody>
-      </p:sp>
-      <p:sp>
-        <p:nvSpPr>
-          <p:cNvPr id="10" name="TextBox 9"/>
-          <p:cNvSpPr txBox="1"/>
-          <p:nvPr/>
-        </p:nvSpPr>
-        <p:spPr>
-          <a:xfrm>
-            <a:off x="3749039" y="1900240"/>
-            <a:ext cx="7680960" cy="822960"/>
-          </a:xfrm>
-          <a:prstGeom prst="rect">
-            <a:avLst/>
-          </a:prstGeom>
-          <a:noFill/>
-        </p:spPr>
-        <p:txBody>
-          <a:bodyPr wrap="square" lIns="0" rIns="0" tIns="0" bIns="0">
-            <a:spAutoFit/>
-          </a:bodyPr>
-          <a:lstStyle/>
-          <a:p>
-            <a:pPr algn="l">
-              <a:spcAft>
-                <a:spcPts val="0"/>
-              </a:spcAft>
-            </a:pPr>
-            <a:r>
-              <a:rPr sz="1250" b="0">
-                <a:solidFill>
-                  <a:srgbClr val="8BA0B6"/>
-                </a:solidFill>
-                <a:latin typeface="Segoe UI"/>
-              </a:rPr>
-              <a:t>Applicant uploads identity and income documents — national ID, employer letter, tax card, utility bill.</a:t>
-            </a:r>
-          </a:p>
-        </p:txBody>
-      </p:sp>
-      <p:sp>
-        <p:nvSpPr>
-          <p:cNvPr id="11" name="TextBox 10"/>
-          <p:cNvSpPr txBox="1"/>
-          <p:nvPr/>
-        </p:nvSpPr>
-        <p:spPr>
-          <a:xfrm>
-            <a:off x="731520" y="2852928"/>
-            <a:ext cx="640080" cy="457200"/>
-          </a:xfrm>
-          <a:prstGeom prst="rect">
-            <a:avLst/>
-          </a:prstGeom>
-          <a:noFill/>
-        </p:spPr>
-        <p:txBody>
-          <a:bodyPr wrap="square" lIns="0" rIns="0" tIns="0" bIns="0">
-            <a:spAutoFit/>
-          </a:bodyPr>
-          <a:lstStyle/>
-          <a:p>
-            <a:pPr algn="l">
-              <a:spcAft>
-                <a:spcPts val="0"/>
-              </a:spcAft>
-            </a:pPr>
-            <a:r>
-              <a:rPr sz="1500" b="1">
-                <a:solidFill>
-                  <a:srgbClr val="4AA8E8"/>
-                </a:solidFill>
                 <a:latin typeface="Consolas"/>
               </a:rPr>
-              <a:t>02</a:t>
-            </a:r>
-          </a:p>
-        </p:txBody>
-      </p:sp>
-      <p:sp>
-        <p:nvSpPr>
-          <p:cNvPr id="12" name="TextBox 11"/>
-          <p:cNvSpPr txBox="1"/>
-          <p:nvPr/>
-        </p:nvSpPr>
-        <p:spPr>
-          <a:xfrm>
-            <a:off x="1463040" y="2832928"/>
-            <a:ext cx="2103120" cy="457200"/>
-          </a:xfrm>
-          <a:prstGeom prst="rect">
-            <a:avLst/>
-          </a:prstGeom>
-          <a:noFill/>
-        </p:spPr>
-        <p:txBody>
-          <a:bodyPr wrap="square" lIns="0" rIns="0" tIns="0" bIns="0">
-            <a:spAutoFit/>
-          </a:bodyPr>
-          <a:lstStyle/>
-          <a:p>
-            <a:pPr algn="l">
-              <a:spcAft>
-                <a:spcPts val="0"/>
-              </a:spcAft>
-            </a:pPr>
-            <a:r>
-              <a:rPr sz="1500" b="1">
+              <a:t>LoRA r=64, 4 epochs, eval loss 0.139,</a:t>
+            </a:r>
+            <a:br/>
+            <a:r>
+              <a:rPr sz="1150" b="0">
                 <a:solidFill>
                   <a:srgbClr val="E8EEF5"/>
                 </a:solidFill>
-                <a:latin typeface="Segoe UI"/>
-              </a:rPr>
-              <a:t>Read</a:t>
-            </a:r>
-          </a:p>
-        </p:txBody>
-      </p:sp>
-      <p:sp>
-        <p:nvSpPr>
-          <p:cNvPr id="13" name="TextBox 12"/>
-          <p:cNvSpPr txBox="1"/>
-          <p:nvPr/>
-        </p:nvSpPr>
-        <p:spPr>
-          <a:xfrm>
-            <a:off x="3749039" y="2832928"/>
-            <a:ext cx="7680960" cy="822960"/>
-          </a:xfrm>
-          <a:prstGeom prst="rect">
-            <a:avLst/>
-          </a:prstGeom>
-          <a:noFill/>
-        </p:spPr>
-        <p:txBody>
-          <a:bodyPr wrap="square" lIns="0" rIns="0" tIns="0" bIns="0">
-            <a:spAutoFit/>
-          </a:bodyPr>
-          <a:lstStyle/>
-          <a:p>
-            <a:pPr algn="l">
-              <a:spcAft>
-                <a:spcPts val="0"/>
-              </a:spcAft>
-            </a:pPr>
-            <a:r>
-              <a:rPr sz="1250" b="0">
-                <a:solidFill>
-                  <a:srgbClr val="8BA0B6"/>
-                </a:solidFill>
-                <a:latin typeface="Segoe UI"/>
-              </a:rPr>
-              <a:t>A 7B vision-language model reads each document natively. No OCR-then-parse pipeline, no template per document type.</a:t>
-            </a:r>
-          </a:p>
-        </p:txBody>
-      </p:sp>
-      <p:sp>
-        <p:nvSpPr>
-          <p:cNvPr id="14" name="TextBox 13"/>
-          <p:cNvSpPr txBox="1"/>
-          <p:nvPr/>
-        </p:nvSpPr>
-        <p:spPr>
-          <a:xfrm>
-            <a:off x="731520" y="3785616"/>
-            <a:ext cx="640080" cy="457200"/>
-          </a:xfrm>
-          <a:prstGeom prst="rect">
-            <a:avLst/>
-          </a:prstGeom>
-          <a:noFill/>
-        </p:spPr>
-        <p:txBody>
-          <a:bodyPr wrap="square" lIns="0" rIns="0" tIns="0" bIns="0">
-            <a:spAutoFit/>
-          </a:bodyPr>
-          <a:lstStyle/>
-          <a:p>
-            <a:pPr algn="l">
-              <a:spcAft>
-                <a:spcPts val="0"/>
-              </a:spcAft>
-            </a:pPr>
-            <a:r>
-              <a:rPr sz="1500" b="1">
-                <a:solidFill>
-                  <a:srgbClr val="4AA8E8"/>
-                </a:solidFill>
                 <a:latin typeface="Consolas"/>
               </a:rPr>
-              <a:t>03</a:t>
-            </a:r>
-          </a:p>
-        </p:txBody>
-      </p:sp>
-      <p:sp>
-        <p:nvSpPr>
-          <p:cNvPr id="15" name="TextBox 14"/>
-          <p:cNvSpPr txBox="1"/>
-          <p:nvPr/>
-        </p:nvSpPr>
-        <p:spPr>
-          <a:xfrm>
-            <a:off x="1463040" y="3765616"/>
-            <a:ext cx="2103120" cy="457200"/>
-          </a:xfrm>
-          <a:prstGeom prst="rect">
-            <a:avLst/>
-          </a:prstGeom>
-          <a:noFill/>
-        </p:spPr>
-        <p:txBody>
-          <a:bodyPr wrap="square" lIns="0" rIns="0" tIns="0" bIns="0">
-            <a:spAutoFit/>
-          </a:bodyPr>
-          <a:lstStyle/>
-          <a:p>
-            <a:pPr algn="l">
-              <a:spcAft>
-                <a:spcPts val="0"/>
-              </a:spcAft>
-            </a:pPr>
-            <a:r>
-              <a:rPr sz="1500" b="1">
-                <a:solidFill>
-                  <a:srgbClr val="E8EEF5"/>
-                </a:solidFill>
-                <a:latin typeface="Segoe UI"/>
-              </a:rPr>
-              <a:t>Cross-check</a:t>
-            </a:r>
-          </a:p>
-        </p:txBody>
-      </p:sp>
-      <p:sp>
-        <p:nvSpPr>
-          <p:cNvPr id="16" name="TextBox 15"/>
-          <p:cNvSpPr txBox="1"/>
-          <p:nvPr/>
-        </p:nvSpPr>
-        <p:spPr>
-          <a:xfrm>
-            <a:off x="3749039" y="3765616"/>
-            <a:ext cx="7680960" cy="822960"/>
-          </a:xfrm>
-          <a:prstGeom prst="rect">
-            <a:avLst/>
-          </a:prstGeom>
-          <a:noFill/>
-        </p:spPr>
-        <p:txBody>
-          <a:bodyPr wrap="square" lIns="0" rIns="0" tIns="0" bIns="0">
-            <a:spAutoFit/>
-          </a:bodyPr>
-          <a:lstStyle/>
-          <a:p>
-            <a:pPr algn="l">
-              <a:spcAft>
-                <a:spcPts val="0"/>
-              </a:spcAft>
-            </a:pPr>
-            <a:r>
-              <a:rPr sz="1250" b="0">
-                <a:solidFill>
-                  <a:srgbClr val="8BA0B6"/>
-                </a:solidFill>
-                <a:latin typeface="Segoe UI"/>
-              </a:rPr>
-              <a:t>Deterministic validation across documents: does the name on the ID match the employer letter, does declared income match the tax card. Arithmetic, not inference.</a:t>
-            </a:r>
-          </a:p>
-        </p:txBody>
-      </p:sp>
-      <p:sp>
-        <p:nvSpPr>
-          <p:cNvPr id="17" name="TextBox 16"/>
-          <p:cNvSpPr txBox="1"/>
-          <p:nvPr/>
-        </p:nvSpPr>
-        <p:spPr>
-          <a:xfrm>
-            <a:off x="731520" y="4718304"/>
-            <a:ext cx="640080" cy="457200"/>
-          </a:xfrm>
-          <a:prstGeom prst="rect">
-            <a:avLst/>
-          </a:prstGeom>
-          <a:noFill/>
-        </p:spPr>
-        <p:txBody>
-          <a:bodyPr wrap="square" lIns="0" rIns="0" tIns="0" bIns="0">
-            <a:spAutoFit/>
-          </a:bodyPr>
-          <a:lstStyle/>
-          <a:p>
-            <a:pPr algn="l">
-              <a:spcAft>
-                <a:spcPts val="0"/>
-              </a:spcAft>
-            </a:pPr>
-            <a:r>
-              <a:rPr sz="1500" b="1">
-                <a:solidFill>
-                  <a:srgbClr val="4AA8E8"/>
-                </a:solidFill>
-                <a:latin typeface="Consolas"/>
-              </a:rPr>
-              <a:t>04</a:t>
-            </a:r>
-          </a:p>
-        </p:txBody>
-      </p:sp>
-      <p:sp>
-        <p:nvSpPr>
-          <p:cNvPr id="18" name="TextBox 17"/>
-          <p:cNvSpPr txBox="1"/>
-          <p:nvPr/>
-        </p:nvSpPr>
-        <p:spPr>
-          <a:xfrm>
-            <a:off x="1463040" y="4698304"/>
-            <a:ext cx="2103120" cy="457200"/>
-          </a:xfrm>
-          <a:prstGeom prst="rect">
-            <a:avLst/>
-          </a:prstGeom>
-          <a:noFill/>
-        </p:spPr>
-        <p:txBody>
-          <a:bodyPr wrap="square" lIns="0" rIns="0" tIns="0" bIns="0">
-            <a:spAutoFit/>
-          </a:bodyPr>
-          <a:lstStyle/>
-          <a:p>
-            <a:pPr algn="l">
-              <a:spcAft>
-                <a:spcPts val="0"/>
-              </a:spcAft>
-            </a:pPr>
-            <a:r>
-              <a:rPr sz="1500" b="1">
-                <a:solidFill>
-                  <a:srgbClr val="E8EEF5"/>
-                </a:solidFill>
-                <a:latin typeface="Segoe UI"/>
-              </a:rPr>
-              <a:t>Decide</a:t>
-            </a:r>
-          </a:p>
-        </p:txBody>
-      </p:sp>
-      <p:sp>
-        <p:nvSpPr>
-          <p:cNvPr id="19" name="TextBox 18"/>
-          <p:cNvSpPr txBox="1"/>
-          <p:nvPr/>
-        </p:nvSpPr>
-        <p:spPr>
-          <a:xfrm>
-            <a:off x="3749039" y="4698304"/>
-            <a:ext cx="7680960" cy="822960"/>
-          </a:xfrm>
-          <a:prstGeom prst="rect">
-            <a:avLst/>
-          </a:prstGeom>
-          <a:noFill/>
-        </p:spPr>
-        <p:txBody>
-          <a:bodyPr wrap="square" lIns="0" rIns="0" tIns="0" bIns="0">
-            <a:spAutoFit/>
-          </a:bodyPr>
-          <a:lstStyle/>
-          <a:p>
-            <a:pPr algn="l">
-              <a:spcAft>
-                <a:spcPts val="0"/>
-              </a:spcAft>
-            </a:pPr>
-            <a:r>
-              <a:rPr sz="1250" b="0">
-                <a:solidFill>
-                  <a:srgbClr val="8BA0B6"/>
-                </a:solidFill>
-                <a:latin typeface="Segoe UI"/>
-              </a:rPr>
-              <a:t>A state machine walks the approval path and records why — every step reconstructable for an auditor.</a:t>
-            </a:r>
-          </a:p>
-        </p:txBody>
-      </p:sp>
-      <p:sp>
-        <p:nvSpPr>
-          <p:cNvPr id="20" name="Rounded Rectangle 19"/>
+              <a:t>on Qwen2.5-VL-7B-Instruct.</a:t>
+            </a:r>
+          </a:p>
+        </p:txBody>
+      </p:sp>
+      <p:sp>
+        <p:nvSpPr>
+          <p:cNvPr id="11" name="Rounded Rectangle 10"/>
           <p:cNvSpPr/>
           <p:nvPr/>
         </p:nvSpPr>
         <p:spPr>
           <a:xfrm>
-            <a:off x="731520" y="5669280"/>
-            <a:ext cx="10698480" cy="566928"/>
+            <a:off x="731520" y="5897880"/>
+            <a:ext cx="10698480" cy="548640"/>
           </a:xfrm>
           <a:prstGeom prst="roundRect">
             <a:avLst/>
@@ -14264,13 +14051,13 @@
       </p:sp>
       <p:sp>
         <p:nvSpPr>
-          <p:cNvPr id="21" name="TextBox 20"/>
+          <p:cNvPr id="12" name="TextBox 11"/>
           <p:cNvSpPr txBox="1"/>
           <p:nvPr/>
         </p:nvSpPr>
         <p:spPr>
           <a:xfrm>
-            <a:off x="1005840" y="5815584"/>
+            <a:off x="1005840" y="6035040"/>
             <a:ext cx="10149840" cy="365760"/>
           </a:xfrm>
           <a:prstGeom prst="rect">
@@ -14296,21 +14083,21 @@
                 </a:solidFill>
                 <a:latin typeface="Segoe UI"/>
               </a:rPr>
-              <a:t>Why it matters here:  the fraud checks are arithmetic, not model output — so the model can be wrong without the decision being unsafe.</a:t>
+              <a:t>The cross-document checks are arithmetic, not model output — so the model can be wrong without the decision being unsafe.</a:t>
             </a:r>
           </a:p>
         </p:txBody>
       </p:sp>
       <p:pic>
         <p:nvPicPr>
-          <p:cNvPr id="22" name="Picture 21" descr="dell-technologies-white.png"/>
+          <p:cNvPr id="13" name="Picture 12" descr="dell-technologies-white.png"/>
           <p:cNvPicPr>
             <a:picLocks noChangeAspect="1"/>
           </p:cNvPicPr>
           <p:nvPr/>
         </p:nvPicPr>
         <p:blipFill>
-          <a:blip r:embed="rId3"/>
+          <a:blip r:embed="rId4"/>
           <a:stretch>
             <a:fillRect/>
           </a:stretch>
@@ -14327,7 +14114,7 @@
       </p:pic>
       <p:sp>
         <p:nvSpPr>
-          <p:cNvPr id="23" name="Rectangle 22"/>
+          <p:cNvPr id="14" name="Rectangle 13"/>
           <p:cNvSpPr/>
           <p:nvPr/>
         </p:nvSpPr>
@@ -14371,14 +14158,14 @@
       </p:sp>
       <p:pic>
         <p:nvPicPr>
-          <p:cNvPr id="24" name="Picture 23" descr="nvidia-white.png"/>
+          <p:cNvPr id="15" name="Picture 14" descr="nvidia-white.png"/>
           <p:cNvPicPr>
             <a:picLocks noChangeAspect="1"/>
           </p:cNvPicPr>
           <p:nvPr/>
         </p:nvPicPr>
         <p:blipFill>
-          <a:blip r:embed="rId4"/>
+          <a:blip r:embed="rId5"/>
           <a:stretch>
             <a:fillRect/>
           </a:stretch>
@@ -14395,7 +14182,7 @@
       </p:pic>
       <p:sp>
         <p:nvSpPr>
-          <p:cNvPr id="25" name="TextBox 24"/>
+          <p:cNvPr id="16" name="TextBox 15"/>
           <p:cNvSpPr txBox="1"/>
           <p:nvPr/>
         </p:nvSpPr>
